--- a/sqlserver-sql/presentation/sqlserver-dql-aggregate-functions.pptx
+++ b/sqlserver-sql/presentation/sqlserver-dql-aggregate-functions.pptx
@@ -11783,7 +11783,7 @@
                 </a:solidFill>
                 <a:latin typeface="Courier"/>
               </a:rPr>
-              <a:t>-- Find the average salary of employees hired after 1982</a:t>
+              <a:t>-- Find the average salary of employees hired after 1985</a:t>
             </a:r>
             <a:br>
               <a:rPr sz="1400" dirty="0"/>
@@ -12186,7 +12186,7 @@
                 </a:solidFill>
                 <a:latin typeface="Courier"/>
               </a:rPr>
-              <a:t>-- Identify the departments where the average salary is higher than $2500</a:t>
+              <a:t>-- Identify the departments where the average salary is higher than $1500</a:t>
             </a:r>
             <a:br>
               <a:rPr sz="1400" dirty="0"/>
